--- a/docs/presentation.pptx
+++ b/docs/presentation.pptx
@@ -485,7 +485,23 @@
           <a:p>
             <a:r>
               <a:rPr lang="en-US" dirty="0"/>
-              <a:t>One of the strongest parts of the project is the overall software architecture. We designed the system as a modular processing pipeline. First, we load the input WAV file. Then we parse either a single edit request or a CSV file containing multiple edits. Next, we convert the requested time interval into sample indices and extract the selected waveform segment. That extracted segment is then passed into the duration-modification stage, which in our case is a TD-PSOLA-based method. After modification, the segment is stitched back into the original waveform, preserving the unedited regions, and the result is written to an output WAV file. We also built a separate evaluation script to generate waveform comparisons, spectrograms, and summary metrics.</a:t>
+              <a:t>One of the strongest parts of the project is the overall software architecture. We designed the system as a modular processing pipeline. First, we load the input WAV file. Then we parse either a single edit request or a CSV file containing multiple edits. Next, we convert the requested time interval into sample indices and extract the selected waveform segment. That extracted segment is then passed into the duration-modification stage, which in our case is a TD-PSOLA-based (</a:t>
+            </a:r>
+            <a:r>
+              <a:rPr lang="en-US" sz="1200" b="0" i="0" kern="1200" dirty="0">
+                <a:solidFill>
+                  <a:schemeClr val="tx1"/>
+                </a:solidFill>
+                <a:effectLst/>
+                <a:latin typeface="+mn-lt"/>
+                <a:ea typeface="+mn-ea"/>
+                <a:cs typeface="+mn-cs"/>
+              </a:rPr>
+              <a:t>Time-Domain Pitch Synchronous Overlap and Add)</a:t>
+            </a:r>
+            <a:r>
+              <a:rPr lang="en-US" dirty="0"/>
+              <a:t> method. After modification, the segment is stitched back into the original waveform, preserving the unedited regions, and the result is written to an output WAV file. We also built a separate evaluation script to generate waveform comparisons, spectrograms, and summary metrics.</a:t>
             </a:r>
           </a:p>
         </p:txBody>
@@ -579,7 +595,34 @@
           <a:p>
             <a:r>
               <a:rPr lang="en-US" dirty="0"/>
-              <a:t>For the core duration-modification method, we chose a time-domain PSOLA approach, specifically TD-PSOLA. At a high level, the algorithm first detects approximate pitch-synchronous marks within the selected speech segment using autocorrelation-based analysis over short frames. Those marks are then refined toward strong local waveform extrema. From the spacing between neighboring pitch marks, we estimate local pitch periods. These periods are then used to place synthesis locations in the modified output segment. For expansion, those synthesis marks are placed farther apart, and for compression they are placed closer together. Around each pitch mark, we extract a local waveform grain, apply a Hann window, and then overlap-add the grains at the new synthesis locations. Finally, a synthesis-weight array is used for normalization. In difficult cases, such as when too few pitch marks are detected, the implementation falls back to simple interpolation rather than forcing a bad PSOLA result.</a:t>
+              <a:t>For duration modification, we used a time-domain PSOLA method, or TD-PSOLA. The main idea is to change the length of a speech segment while preserving its perceived pitch and overall naturalness as much as possible. To do that, the algorithm first analyzes the selected speech region to find approximate pitch-synchronous locations, meaning points that line up with the natural repeating structure of voiced speech. We estimate these using autocorrelation over short analysis frames, since pitch can vary over time and needs to be tracked locally rather than across the entire signal at once.</a:t>
+            </a:r>
+          </a:p>
+          <a:p>
+            <a:endParaRPr lang="en-US" dirty="0"/>
+          </a:p>
+          <a:p>
+            <a:r>
+              <a:rPr lang="en-US" dirty="0"/>
+              <a:t>Once we have those approximate pitch marks, we refine them by shifting them toward strong nearby waveform extrema, such as prominent peaks or troughs. This helps the extracted waveform segments line up more naturally with the underlying signal and reduces discontinuities during reconstruction. From the spacing between neighboring pitch marks, we then estimate the local pitch period, which gives us the basic timing information needed for resynthesis.</a:t>
+            </a:r>
+          </a:p>
+          <a:p>
+            <a:endParaRPr lang="en-US" dirty="0"/>
+          </a:p>
+          <a:p>
+            <a:r>
+              <a:rPr lang="en-US" dirty="0"/>
+              <a:t>Using those pitch periods, we define synthesis mark locations in the modified output. For time expansion, the synthesis marks are spaced farther apart so the segment becomes longer. For time compression, they are placed closer together so the segment becomes shorter. Around each pitch mark, we extract a short local waveform grain, apply a Hann window to taper its edges smoothly, and then overlap-add these grains at the new synthesis positions. The Hann window helps reduce artifacts at grain boundaries, while the overlap-add process reconstructs a continuous output waveform from the individual pitch-aligned segments.</a:t>
+            </a:r>
+          </a:p>
+          <a:p>
+            <a:endParaRPr lang="en-US" dirty="0"/>
+          </a:p>
+          <a:p>
+            <a:r>
+              <a:rPr lang="en-US" dirty="0"/>
+              <a:t>Because multiple windowed grains can overlap by different amounts across the output, we also keep a synthesis-weight array and use it to normalize the final signal. This prevents unwanted amplitude changes and keeps the reconstruction more stable. Finally, if the signal is too difficult for reliable pitch-mark detection, such as when too few marks are found, the implementation falls back to simple interpolation instead of forcing a poor PSOLA result. That makes the system more robust in difficult cases and avoids severe audible artifacts.</a:t>
             </a:r>
           </a:p>
         </p:txBody>
@@ -1177,7 +1220,7 @@
           </a:prstGeom>
           <a:extLst>
             <a:ext uri="{C572A759-6A51-4108-AA02-DFA0A04FC94B}">
-              <ma14:wrappingTextBoxFlag xmlns="" xmlns:ma14="http://schemas.microsoft.com/office/mac/drawingml/2011/main" val="0"/>
+              <ma14:wrappingTextBoxFlag xmlns:ma14="http://schemas.microsoft.com/office/mac/drawingml/2011/main" xmlns="" val="0"/>
             </a:ext>
           </a:extLst>
         </p:spPr>
@@ -1255,7 +1298,7 @@
           </a:prstGeom>
           <a:extLst>
             <a:ext uri="{C572A759-6A51-4108-AA02-DFA0A04FC94B}">
-              <ma14:wrappingTextBoxFlag xmlns="" xmlns:ma14="http://schemas.microsoft.com/office/mac/drawingml/2011/main" val="0"/>
+              <ma14:wrappingTextBoxFlag xmlns:ma14="http://schemas.microsoft.com/office/mac/drawingml/2011/main" xmlns="" val="0"/>
             </a:ext>
           </a:extLst>
         </p:spPr>
@@ -1933,7 +1976,7 @@
           </a:prstGeom>
           <a:extLst>
             <a:ext uri="{C572A759-6A51-4108-AA02-DFA0A04FC94B}">
-              <ma14:wrappingTextBoxFlag xmlns="" xmlns:ma14="http://schemas.microsoft.com/office/mac/drawingml/2011/main" val="0"/>
+              <ma14:wrappingTextBoxFlag xmlns:ma14="http://schemas.microsoft.com/office/mac/drawingml/2011/main" xmlns="" val="0"/>
             </a:ext>
           </a:extLst>
         </p:spPr>
@@ -2577,7 +2620,7 @@
           </a:prstGeom>
           <a:extLst>
             <a:ext uri="{C572A759-6A51-4108-AA02-DFA0A04FC94B}">
-              <ma14:wrappingTextBoxFlag xmlns="" xmlns:ma14="http://schemas.microsoft.com/office/mac/drawingml/2011/main" val="0"/>
+              <ma14:wrappingTextBoxFlag xmlns:ma14="http://schemas.microsoft.com/office/mac/drawingml/2011/main" xmlns="" val="0"/>
             </a:ext>
           </a:extLst>
         </p:spPr>
@@ -3856,7 +3899,7 @@
           </a:prstGeom>
           <a:extLst>
             <a:ext uri="{C572A759-6A51-4108-AA02-DFA0A04FC94B}">
-              <ma14:wrappingTextBoxFlag xmlns="" xmlns:ma14="http://schemas.microsoft.com/office/mac/drawingml/2011/main" val="0"/>
+              <ma14:wrappingTextBoxFlag xmlns:ma14="http://schemas.microsoft.com/office/mac/drawingml/2011/main" xmlns="" val="0"/>
             </a:ext>
           </a:extLst>
         </p:spPr>
@@ -4790,7 +4833,7 @@
           </a:prstGeom>
           <a:extLst>
             <a:ext uri="{C572A759-6A51-4108-AA02-DFA0A04FC94B}">
-              <ma14:wrappingTextBoxFlag xmlns="" xmlns:ma14="http://schemas.microsoft.com/office/mac/drawingml/2011/main" val="0"/>
+              <ma14:wrappingTextBoxFlag xmlns:ma14="http://schemas.microsoft.com/office/mac/drawingml/2011/main" xmlns="" val="0"/>
             </a:ext>
           </a:extLst>
         </p:spPr>
@@ -6208,7 +6251,7 @@
           </a:prstGeom>
           <a:extLst>
             <a:ext uri="{C572A759-6A51-4108-AA02-DFA0A04FC94B}">
-              <ma14:wrappingTextBoxFlag xmlns="" xmlns:ma14="http://schemas.microsoft.com/office/mac/drawingml/2011/main" val="0"/>
+              <ma14:wrappingTextBoxFlag xmlns:ma14="http://schemas.microsoft.com/office/mac/drawingml/2011/main" xmlns="" val="0"/>
             </a:ext>
           </a:extLst>
         </p:spPr>
@@ -6844,7 +6887,7 @@
           </a:prstGeom>
           <a:extLst>
             <a:ext uri="{C572A759-6A51-4108-AA02-DFA0A04FC94B}">
-              <ma14:wrappingTextBoxFlag xmlns="" xmlns:ma14="http://schemas.microsoft.com/office/mac/drawingml/2011/main" val="0"/>
+              <ma14:wrappingTextBoxFlag xmlns:ma14="http://schemas.microsoft.com/office/mac/drawingml/2011/main" xmlns="" val="0"/>
             </a:ext>
           </a:extLst>
         </p:spPr>
@@ -7103,7 +7146,7 @@
         <p:spPr>
           <a:xfrm>
             <a:off x="3291840" y="1417320"/>
-            <a:ext cx="4069080" cy="1965960"/>
+            <a:ext cx="4069080" cy="3347904"/>
           </a:xfrm>
           <a:prstGeom prst="roundRect">
             <a:avLst>
@@ -7151,7 +7194,7 @@
         </p:blipFill>
         <p:spPr>
           <a:xfrm>
-            <a:off x="3493008" y="1642872"/>
+            <a:off x="3510844" y="1630680"/>
             <a:ext cx="3657600" cy="1524000"/>
           </a:xfrm>
           <a:prstGeom prst="rect">
@@ -7167,7 +7210,7 @@
         </p:nvSpPr>
         <p:spPr>
           <a:xfrm>
-            <a:off x="7543800" y="1417320"/>
+            <a:off x="7528560" y="2171700"/>
             <a:ext cx="3931920" cy="1965960"/>
           </a:xfrm>
           <a:prstGeom prst="roundRect">
@@ -7216,7 +7259,7 @@
         </p:blipFill>
         <p:spPr>
           <a:xfrm>
-            <a:off x="8001000" y="1645920"/>
+            <a:off x="7985760" y="2400300"/>
             <a:ext cx="3017520" cy="1508760"/>
           </a:xfrm>
           <a:prstGeom prst="rect">
@@ -7232,7 +7275,7 @@
         </p:nvSpPr>
         <p:spPr>
           <a:xfrm>
-            <a:off x="3291840" y="3657600"/>
+            <a:off x="3291840" y="4931325"/>
             <a:ext cx="8183880" cy="1417320"/>
           </a:xfrm>
           <a:prstGeom prst="roundRect">
@@ -7273,7 +7316,7 @@
         </p:nvSpPr>
         <p:spPr>
           <a:xfrm>
-            <a:off x="3584448" y="3977640"/>
+            <a:off x="3543300" y="5249898"/>
             <a:ext cx="7635240" cy="822960"/>
           </a:xfrm>
           <a:prstGeom prst="rect">
@@ -7321,7 +7364,7 @@
           </a:prstGeom>
           <a:extLst>
             <a:ext uri="{C572A759-6A51-4108-AA02-DFA0A04FC94B}">
-              <ma14:wrappingTextBoxFlag xmlns="" xmlns:ma14="http://schemas.microsoft.com/office/mac/drawingml/2011/main" val="0"/>
+              <ma14:wrappingTextBoxFlag xmlns:ma14="http://schemas.microsoft.com/office/mac/drawingml/2011/main" xmlns="" val="0"/>
             </a:ext>
           </a:extLst>
         </p:spPr>
@@ -7349,6 +7392,36 @@
           </a:p>
         </p:txBody>
       </p:sp>
+      <p:pic>
+        <p:nvPicPr>
+          <p:cNvPr id="14" name="Picture 13">
+            <a:extLst>
+              <a:ext uri="{FF2B5EF4-FFF2-40B4-BE49-F238E27FC236}">
+                <a16:creationId xmlns:a16="http://schemas.microsoft.com/office/drawing/2014/main" id="{E4A646AE-A43C-1F0B-3EEE-827D0D42175D}"/>
+              </a:ext>
+            </a:extLst>
+          </p:cNvPr>
+          <p:cNvPicPr>
+            <a:picLocks noChangeAspect="1"/>
+          </p:cNvPicPr>
+          <p:nvPr/>
+        </p:nvPicPr>
+        <p:blipFill>
+          <a:blip r:embed="rId5"/>
+          <a:stretch>
+            <a:fillRect/>
+          </a:stretch>
+        </p:blipFill>
+        <p:spPr>
+          <a:xfrm>
+            <a:off x="3510845" y="3241224"/>
+            <a:ext cx="3657600" cy="1524000"/>
+          </a:xfrm>
+          <a:prstGeom prst="rect">
+            <a:avLst/>
+          </a:prstGeom>
+        </p:spPr>
+      </p:pic>
     </p:spTree>
   </p:cSld>
   <p:clrMapOvr>
@@ -7972,7 +8045,7 @@
           </a:prstGeom>
           <a:extLst>
             <a:ext uri="{C572A759-6A51-4108-AA02-DFA0A04FC94B}">
-              <ma14:wrappingTextBoxFlag xmlns="" xmlns:ma14="http://schemas.microsoft.com/office/mac/drawingml/2011/main" val="0"/>
+              <ma14:wrappingTextBoxFlag xmlns:ma14="http://schemas.microsoft.com/office/mac/drawingml/2011/main" xmlns="" val="0"/>
             </a:ext>
           </a:extLst>
         </p:spPr>
